--- a/public/fun/pack/pptx/talkpro/발표템플릿프리미엄_43_업무보고_크림슨골드.pptx
+++ b/public/fun/pack/pptx/talkpro/발표템플릿프리미엄_43_업무보고_크림슨골드.pptx
@@ -115,12 +115,12 @@
   <p:extLst>
     <p:ext uri="{521415D9-36F7-43E2-AB2F-B90AF26B5E84}">
       <p14:sectionLst xmlns:p14="http://schemas.microsoft.com/office/powerpoint/2010/main">
-        <p14:section name="시작" id="{554DC3FC-1152-4047-AEED-3374C100AF77}">
+        <p14:section name="시작" id="{8AC02826-9929-4C23-ADC0-D058FFC8686F}">
           <p14:sldIdLst>
             <p14:sldId id="256"/>
           </p14:sldIdLst>
         </p14:section>
-        <p14:section name="본문" id="{3CD0666C-F962-4903-A747-53E73884DD64}">
+        <p14:section name="본문" id="{4A65F6BA-CBB4-429A-B4A3-69AB4858A7E8}">
           <p14:sldIdLst>
             <p14:sldId id="257"/>
             <p14:sldId id="258"/>
@@ -131,7 +131,7 @@
             <p14:sldId id="263"/>
           </p14:sldIdLst>
         </p14:section>
-        <p14:section name="마무리" id="{DEF0CB91-C0EF-4D52-99F7-D01D30EBA51C}">
+        <p14:section name="마무리" id="{AC481514-DBCE-42D5-9621-638B93B8A01A}">
           <p14:sldIdLst>
             <p14:sldId id="264"/>
           </p14:sldIdLst>
@@ -1816,7 +1816,7 @@
             </a:lvl1pPr>
           </a:lstStyle>
           <a:p>
-            <a:fld id="{7CCEAF23-1004-4F38-870B-84AA5E893C61}" type="slidenum">
+            <a:fld id="{E3B33EA1-E2E8-4972-9591-666C0479E84A}" type="slidenum">
               <a:rPr lang="en-US"/>
               <a:t>‹#›</a:t>
             </a:fld>
@@ -2478,7 +2478,7 @@
             </a:lvl1pPr>
           </a:lstStyle>
           <a:p>
-            <a:fld id="{D73BAB98-8A53-4917-93DD-9BC8FFDF7A8D}" type="slidenum">
+            <a:fld id="{D41836BE-0B36-4A96-9813-BEEEACD52FDE}" type="slidenum">
               <a:rPr lang="en-US"/>
               <a:t>‹#›</a:t>
             </a:fld>
@@ -3219,7 +3219,7 @@
             </a:lvl1pPr>
           </a:lstStyle>
           <a:p>
-            <a:fld id="{6D54FF4F-C4C2-4FD0-A83D-102C708DD67F}" type="slidenum">
+            <a:fld id="{7D3F1063-028C-4269-AC0A-1D42C1DF76B0}" type="slidenum">
               <a:rPr lang="en-US"/>
               <a:t>‹#›</a:t>
             </a:fld>
@@ -4082,7 +4082,7 @@
           <a:p>
             <a:r>
               <a:rPr lang="ko-KR"/>
-              <a:t>연말 전에 마무리할 일 목록입니다</a:t>
+              <a:t>마감 전에 마무리할 일 목록입니다</a:t>
             </a:r>
           </a:p>
         </p:txBody>
@@ -4110,7 +4110,7 @@
           <a:p>
             <a:r>
               <a:rPr lang="ko-KR"/>
-              <a:t>0000. 00. 00</a:t>
+              <a:t>날짜 입력</a:t>
             </a:r>
           </a:p>
         </p:txBody>
@@ -4217,7 +4217,7 @@
           <a:bodyPr/>
           <a:lstStyle/>
           <a:p>
-            <a:fld id="{1798AF6D-AB57-4719-8671-B81D358F2480}" type="slidenum">
+            <a:fld id="{A3278F33-1DD4-457A-9D9D-6E25D7A4E4A3}" type="slidenum">
               <a:rPr lang="en-US"/>
               <a:t>‹#›</a:t>
             </a:fld>
@@ -5437,7 +5437,7 @@
           <a:bodyPr/>
           <a:lstStyle/>
           <a:p>
-            <a:fld id="{CCFAA7DC-835D-4BAB-A9EB-40740DF073EF}" type="slidenum">
+            <a:fld id="{5653BCF8-22F9-4ADF-846D-4DFFE341D6C0}" type="slidenum">
               <a:rPr lang="en-US"/>
               <a:t>‹#›</a:t>
             </a:fld>
@@ -5547,7 +5547,7 @@
           <a:bodyPr/>
           <a:lstStyle/>
           <a:p>
-            <a:fld id="{79868377-4A41-4944-9466-276D9D4BAF3F}" type="slidenum">
+            <a:fld id="{98C34D51-BA5B-46F9-BCC1-133ED00B0937}" type="slidenum">
               <a:rPr lang="en-US"/>
               <a:t>‹#›</a:t>
             </a:fld>
@@ -6539,7 +6539,7 @@
           <a:bodyPr/>
           <a:lstStyle/>
           <a:p>
-            <a:fld id="{94268B44-7F72-4C33-BB5B-C2AC2AB38975}" type="slidenum">
+            <a:fld id="{524A1F1B-37FA-453A-A9D0-E2C8C134F8D0}" type="slidenum">
               <a:rPr lang="en-US"/>
               <a:t>‹#›</a:t>
             </a:fld>
@@ -7213,7 +7213,7 @@
           <a:bodyPr/>
           <a:lstStyle/>
           <a:p>
-            <a:fld id="{2163BEEE-B6B5-4741-A4DE-500B7EAA7AA3}" type="slidenum">
+            <a:fld id="{368A0094-9F49-4001-8A29-CF29DB25B957}" type="slidenum">
               <a:rPr lang="en-US"/>
               <a:t>‹#›</a:t>
             </a:fld>
@@ -7418,7 +7418,7 @@
           <a:bodyPr/>
           <a:lstStyle/>
           <a:p>
-            <a:fld id="{9D918DFA-1331-4C9B-8A4D-F6B451E2B4B0}" type="slidenum">
+            <a:fld id="{0AA51416-0FC9-41AF-B388-5AF5A27B5DD4}" type="slidenum">
               <a:rPr lang="en-US"/>
               <a:t>‹#›</a:t>
             </a:fld>
@@ -8504,7 +8504,7 @@
           <a:bodyPr/>
           <a:lstStyle/>
           <a:p>
-            <a:fld id="{83F6CECE-BACE-4C0D-805D-D1B3B9A03295}" type="slidenum">
+            <a:fld id="{8BBBAAEC-D2F0-460C-B49D-3D14E38A9F3E}" type="slidenum">
               <a:rPr lang="en-US"/>
               <a:t>‹#›</a:t>
             </a:fld>
